--- a/docs/presentation_de.pptx
+++ b/docs/presentation_de.pptx
@@ -5,19 +5,14 @@
     <p:sldMasterId id="2147483648" r:id="rId1"/>
   </p:sldMasterIdLst>
   <p:notesMasterIdLst>
-    <p:notesMasterId r:id="rId12"/>
+    <p:notesMasterId r:id="rId7"/>
   </p:notesMasterIdLst>
   <p:sldIdLst>
     <p:sldId id="257" r:id="rId2"/>
     <p:sldId id="258" r:id="rId3"/>
     <p:sldId id="261" r:id="rId4"/>
     <p:sldId id="260" r:id="rId5"/>
-    <p:sldId id="262" r:id="rId6"/>
-    <p:sldId id="263" r:id="rId7"/>
-    <p:sldId id="264" r:id="rId8"/>
-    <p:sldId id="265" r:id="rId9"/>
-    <p:sldId id="266" r:id="rId10"/>
-    <p:sldId id="267" r:id="rId11"/>
+    <p:sldId id="267" r:id="rId6"/>
   </p:sldIdLst>
   <p:sldSz cx="9144000" cy="6858000" type="screen4x3"/>
   <p:notesSz cx="6858000" cy="9144000"/>
@@ -540,34 +535,116 @@
             </a:br>
             <a:r>
               <a:rPr lang="de-DE" dirty="0"/>
-              <a:t>Heute präsentiere ich meine Node.js Miniprogramme. </a:t>
-            </a:r>
-            <a:br>
-              <a:rPr lang="de-DE" dirty="0"/>
-            </a:br>
-            <a:br>
-              <a:rPr lang="de-DE" dirty="0"/>
-            </a:br>
-            <a:r>
-              <a:rPr lang="de-DE" dirty="0"/>
-              <a:t>Mein Ziel war es, komplexe Logik in JavaScript zu üben und diese sowohl im Terminal als auch im Browser umzusetzen.</a:t>
+              <a:t>Heute präsentiere ich meine Node.js Miniprogramme.</a:t>
             </a:r>
           </a:p>
           <a:p>
             <a:endParaRPr lang="de-DE" dirty="0"/>
           </a:p>
           <a:p>
-            <a:r>
-              <a:rPr lang="de-DE" dirty="0"/>
-              <a:t>Dazu habe ich drei kleine Programme mit Node.js implementiert: Schere Stein Papier, Pig </a:t>
+            <a:pPr marL="0" marR="0" lvl="0" indent="0" algn="l" defTabSz="914400" rtl="0" eaLnBrk="1" fontAlgn="auto" latinLnBrk="0" hangingPunct="1">
+              <a:lnSpc>
+                <a:spcPct val="100000"/>
+              </a:lnSpc>
+              <a:spcBef>
+                <a:spcPts val="0"/>
+              </a:spcBef>
+              <a:spcAft>
+                <a:spcPts val="0"/>
+              </a:spcAft>
+              <a:buClrTx/>
+              <a:buSzTx/>
+              <a:buFontTx/>
+              <a:buNone/>
+              <a:tabLst/>
+              <a:defRPr/>
+            </a:pPr>
+            <a:r>
+              <a:rPr lang="de-DE" dirty="0"/>
+              <a:t>Mein Fokus lag nicht nur auf der Funktionalität, sondern vor allem darauf, sauberen und effizienten Code zu schreiben.</a:t>
+            </a:r>
+          </a:p>
+          <a:p>
+            <a:endParaRPr lang="de-DE" dirty="0"/>
+          </a:p>
+          <a:p>
+            <a:r>
+              <a:rPr lang="de-DE" dirty="0"/>
+              <a:t>Hier sehen Sie die Übersicht: ein Spiel und zwei Text-Tools. </a:t>
+            </a:r>
+          </a:p>
+          <a:p>
+            <a:endParaRPr lang="de-DE" dirty="0"/>
+          </a:p>
+          <a:p>
+            <a:r>
+              <a:rPr lang="de-DE" dirty="0"/>
+              <a:t>Ich habe auch für das Spiel eine Browser-Version mit </a:t>
             </a:r>
             <a:r>
               <a:rPr lang="de-DE" dirty="0" err="1"/>
-              <a:t>Latin</a:t>
-            </a:r>
-            <a:r>
-              <a:rPr lang="de-DE" dirty="0"/>
-              <a:t> und Caesar-Verschlüsselung.</a:t>
+              <a:t>Tailwind</a:t>
+            </a:r>
+            <a:r>
+              <a:rPr lang="de-DE" dirty="0"/>
+              <a:t> CSS erstellt, um die Trennung von Logik und UI zu zeigen. </a:t>
+            </a:r>
+          </a:p>
+          <a:p>
+            <a:endParaRPr lang="de-DE" dirty="0"/>
+          </a:p>
+          <a:p>
+            <a:r>
+              <a:rPr lang="de-DE" dirty="0"/>
+              <a:t>Aber heute möchte ich mich auf das technisch sp</a:t>
+            </a:r>
+            <a:r>
+              <a:rPr lang="de-DE" b="0" dirty="0">
+                <a:solidFill>
+                  <a:srgbClr val="FF0000"/>
+                </a:solidFill>
+              </a:rPr>
+              <a:t>a</a:t>
+            </a:r>
+            <a:r>
+              <a:rPr lang="de-DE" dirty="0"/>
+              <a:t>nnendste </a:t>
+            </a:r>
+            <a:r>
+              <a:rPr lang="zh-CN" altLang="de-DE" dirty="0"/>
+              <a:t>（</a:t>
+            </a:r>
+            <a:r>
+              <a:rPr lang="de-DE" altLang="zh-CN" dirty="0"/>
+              <a:t>span </a:t>
+            </a:r>
+            <a:r>
+              <a:rPr lang="de-DE" altLang="zh-CN" dirty="0" err="1"/>
+              <a:t>nend</a:t>
+            </a:r>
+            <a:r>
+              <a:rPr lang="de-DE" altLang="zh-CN" dirty="0"/>
+              <a:t> </a:t>
+            </a:r>
+            <a:r>
+              <a:rPr lang="de-DE" altLang="zh-CN" dirty="0" err="1"/>
+              <a:t>ste</a:t>
+            </a:r>
+            <a:r>
+              <a:rPr lang="zh-CN" altLang="de-DE" dirty="0"/>
+              <a:t>）</a:t>
+            </a:r>
+            <a:r>
+              <a:rPr lang="de-DE" dirty="0"/>
+              <a:t> Projekt konzentrieren: die </a:t>
+            </a:r>
+            <a:r>
+              <a:rPr lang="de-DE" b="1" dirty="0"/>
+              <a:t>Caesar Ver-/Entschlüsselung</a:t>
+            </a:r>
+            <a:r>
+              <a:rPr lang="de-DE" dirty="0"/>
+              <a:t>.</a:t>
             </a:r>
           </a:p>
         </p:txBody>
@@ -652,133 +729,73 @@
           <a:bodyPr/>
           <a:lstStyle/>
           <a:p>
-            <a:r>
-              <a:rPr lang="de-DE" dirty="0"/>
-              <a:t>Zuerst zeige ich mein wichtigstes Projekt Schere Stein Papier. </a:t>
-            </a:r>
-          </a:p>
-          <a:p>
             <a:endParaRPr lang="de-DE" dirty="0"/>
           </a:p>
           <a:p>
             <a:r>
-              <a:rPr lang="de-DE" dirty="0"/>
-              <a:t>Ich habe den Code in drei Stufen verbessert:</a:t>
-            </a:r>
-          </a:p>
-          <a:p>
-            <a:endParaRPr lang="de-DE" dirty="0"/>
-          </a:p>
-          <a:p>
-            <a:r>
-              <a:rPr lang="de-DE" dirty="0"/>
-              <a:t>V1: </a:t>
-            </a:r>
-          </a:p>
-          <a:p>
-            <a:r>
-              <a:rPr lang="de-DE" dirty="0"/>
-              <a:t>In der ersten Version habe ich viele </a:t>
-            </a:r>
-            <a:r>
-              <a:rPr lang="de-DE" dirty="0" err="1"/>
+              <a:rPr lang="de-DE" sz="1800" dirty="0"/>
+              <a:t>Bevor wir zum Caesar-</a:t>
+            </a:r>
+            <a:r>
+              <a:rPr lang="de-DE" sz="1800" dirty="0" err="1"/>
+              <a:t>Cipher</a:t>
+            </a:r>
+            <a:r>
+              <a:rPr lang="zh-CN" altLang="de-DE" sz="1800" dirty="0"/>
+              <a:t>（</a:t>
+            </a:r>
+            <a:r>
+              <a:rPr lang="de-DE" altLang="zh-CN" sz="1800" dirty="0" err="1"/>
+              <a:t>kaise</a:t>
+            </a:r>
+            <a:r>
+              <a:rPr lang="zh-CN" altLang="de-DE" sz="1800" dirty="0"/>
+              <a:t>，塞</a:t>
+            </a:r>
+            <a:r>
+              <a:rPr lang="de-DE" altLang="zh-CN" sz="1800" dirty="0" err="1"/>
+              <a:t>fe</a:t>
+            </a:r>
+            <a:r>
+              <a:rPr lang="zh-CN" altLang="de-DE" sz="1800" dirty="0"/>
+              <a:t>）</a:t>
+            </a:r>
+            <a:r>
+              <a:rPr lang="de-DE" sz="1800" dirty="0"/>
+              <a:t> kommen, ein kurzes Beispiel für meine Arbeitsweise: </a:t>
+            </a:r>
+          </a:p>
+          <a:p>
+            <a:endParaRPr lang="de-DE" sz="1800" dirty="0"/>
+          </a:p>
+          <a:p>
+            <a:r>
+              <a:rPr lang="de-DE" sz="1800" dirty="0"/>
+              <a:t>Bei 'Stein, Schere, Papier' habe ich den Code von einfachen </a:t>
+            </a:r>
+            <a:r>
+              <a:rPr lang="de-DE" sz="1800" kern="1200" dirty="0" err="1">
+                <a:solidFill>
+                  <a:schemeClr val="tx1"/>
+                </a:solidFill>
+                <a:latin typeface="+mn-lt"/>
+                <a:ea typeface="+mn-ea"/>
+                <a:cs typeface="+mn-cs"/>
+              </a:rPr>
               <a:t>if</a:t>
             </a:r>
             <a:r>
-              <a:rPr lang="de-DE" dirty="0"/>
-              <a:t>- und switch-Anweisungen verwendet.</a:t>
-            </a:r>
-          </a:p>
-          <a:p>
-            <a:r>
-              <a:rPr lang="de-DE" dirty="0"/>
-              <a:t>Das funktioniert, aber der Code ist relativ lang und enthält Wiederholungen.</a:t>
-            </a:r>
-          </a:p>
-          <a:p>
-            <a:endParaRPr lang="de-DE" dirty="0"/>
-          </a:p>
-          <a:p>
-            <a:r>
-              <a:rPr lang="de-DE" dirty="0"/>
-              <a:t>V2:</a:t>
-            </a:r>
-          </a:p>
-          <a:p>
-            <a:r>
-              <a:rPr lang="de-DE" dirty="0"/>
-              <a:t>In der zweiten Version habe ich eine </a:t>
-            </a:r>
-            <a:r>
-              <a:rPr lang="de-DE" dirty="0" err="1"/>
-              <a:t>Map</a:t>
-            </a:r>
-            <a:r>
-              <a:rPr lang="de-DE" dirty="0"/>
-              <a:t> (</a:t>
-            </a:r>
-            <a:r>
-              <a:rPr lang="de-DE" dirty="0" err="1"/>
-              <a:t>key</a:t>
-            </a:r>
-            <a:r>
-              <a:rPr lang="de-DE" dirty="0"/>
-              <a:t> gewinnt gegen </a:t>
-            </a:r>
-            <a:r>
-              <a:rPr lang="de-DE" dirty="0" err="1"/>
-              <a:t>value</a:t>
-            </a:r>
-            <a:r>
-              <a:rPr lang="de-DE" dirty="0"/>
-              <a:t>) verwendet.</a:t>
-            </a:r>
-          </a:p>
-          <a:p>
-            <a:r>
-              <a:rPr lang="de-DE" dirty="0"/>
-              <a:t>Zum Beispiel: Stein gewinnt gegen Schere, Papier gewinnt gegen Stein.</a:t>
-            </a:r>
-          </a:p>
-          <a:p>
-            <a:r>
-              <a:rPr lang="de-DE" dirty="0"/>
-              <a:t>Dadurch wird der Code klarer und einfacher.</a:t>
-            </a:r>
-          </a:p>
-          <a:p>
-            <a:endParaRPr lang="de-DE" dirty="0"/>
-          </a:p>
-          <a:p>
-            <a:r>
-              <a:rPr lang="de-DE" dirty="0"/>
-              <a:t>V3:</a:t>
-            </a:r>
-          </a:p>
-          <a:p>
-            <a:r>
-              <a:rPr lang="de-DE" dirty="0"/>
-              <a:t>Der dritten Version ist mit einer mathematischen Lösung implementiert, die auch in der </a:t>
-            </a:r>
-            <a:r>
-              <a:rPr lang="de-DE" dirty="0" err="1"/>
-              <a:t>Caeser</a:t>
-            </a:r>
-            <a:r>
-              <a:rPr lang="de-DE" dirty="0"/>
-              <a:t> Ver-/Entschlüsselung benutzt.</a:t>
-            </a:r>
-          </a:p>
-          <a:p>
-            <a:r>
-              <a:rPr lang="de-DE" dirty="0"/>
-              <a:t>Diese Lösung ist kürzer und eleganter.</a:t>
-            </a:r>
-          </a:p>
-          <a:p>
-            <a:r>
-              <a:rPr lang="de-DE" dirty="0"/>
-              <a:t>Sie beschreibt die zirkuläre Beziehung im Spiel.</a:t>
+              <a:rPr lang="de-DE" sz="1800" dirty="0"/>
+              <a:t>-Abfragen bis hin zu einer eleganten mathematischen Modulo-Lösung optimiert. </a:t>
+            </a:r>
+          </a:p>
+          <a:p>
+            <a:endParaRPr lang="de-DE" sz="1800" dirty="0"/>
+          </a:p>
+          <a:p>
+            <a:r>
+              <a:rPr lang="de-DE" sz="1800" dirty="0"/>
+              <a:t>Diesen hohen Anspruch an die Logik habe ich auch auf das nächste Projekt übertragen.</a:t>
             </a:r>
           </a:p>
         </p:txBody>
@@ -865,7 +882,7 @@
           <a:p>
             <a:r>
               <a:rPr lang="de-DE" dirty="0"/>
-              <a:t>Das zweite Programm ist Pig </a:t>
+              <a:t>Bei Pig </a:t>
             </a:r>
             <a:r>
               <a:rPr lang="de-DE" dirty="0" err="1"/>
@@ -873,7 +890,15 @@
             </a:r>
             <a:r>
               <a:rPr lang="de-DE" dirty="0"/>
-              <a:t>.</a:t>
+              <a:t> habe ich komplexe String-Methoden und Regular </a:t>
+            </a:r>
+            <a:r>
+              <a:rPr lang="de-DE" altLang="zh-CN" dirty="0"/>
+              <a:t>Ausdruck</a:t>
+            </a:r>
+            <a:r>
+              <a:rPr lang="de-DE" dirty="0"/>
+              <a:t> genutzt, </a:t>
             </a:r>
           </a:p>
           <a:p>
@@ -882,46 +907,63 @@
           <a:p>
             <a:r>
               <a:rPr lang="de-DE" dirty="0"/>
-              <a:t>Hier wird ein Satz Wort für Wort umgewandelt.</a:t>
-            </a:r>
-          </a:p>
-          <a:p>
-            <a:endParaRPr lang="de-DE" dirty="0"/>
-          </a:p>
-          <a:p>
-            <a:r>
-              <a:rPr lang="de-DE" dirty="0"/>
-              <a:t>Dafür werden 3 verschiedene Fälle behandelt:</a:t>
-            </a:r>
-          </a:p>
-          <a:p>
-            <a:pPr marL="228600" indent="-228600">
-              <a:buFont typeface="+mj-lt"/>
-              <a:buAutoNum type="arabicPeriod"/>
-            </a:pPr>
-            <a:r>
-              <a:rPr lang="de-DE" dirty="0"/>
-              <a:t>Wörter mit Vokalen</a:t>
-            </a:r>
-          </a:p>
-          <a:p>
-            <a:pPr marL="228600" indent="-228600">
-              <a:buFont typeface="+mj-lt"/>
-              <a:buAutoNum type="arabicPeriod"/>
-            </a:pPr>
-            <a:r>
-              <a:rPr lang="de-DE" dirty="0"/>
-              <a:t>Wörter mit Konsonanten</a:t>
-            </a:r>
-          </a:p>
-          <a:p>
-            <a:pPr marL="228600" indent="-228600">
-              <a:buFont typeface="+mj-lt"/>
-              <a:buAutoNum type="arabicPeriod"/>
-            </a:pPr>
-            <a:r>
-              <a:rPr lang="de-DE" dirty="0"/>
-              <a:t>und spezielle Fälle wie „</a:t>
+              <a:t>um verschiedene linguistische Fälle wie Vokale</a:t>
+            </a:r>
+            <a:r>
+              <a:rPr lang="zh-CN" altLang="de-DE" dirty="0"/>
+              <a:t>（</a:t>
+            </a:r>
+            <a:r>
+              <a:rPr lang="de-DE" altLang="zh-CN" dirty="0"/>
+              <a:t>wo </a:t>
+            </a:r>
+            <a:r>
+              <a:rPr lang="de-DE" altLang="zh-CN" dirty="0" err="1"/>
+              <a:t>ka</a:t>
+            </a:r>
+            <a:r>
+              <a:rPr lang="de-DE" altLang="zh-CN" dirty="0"/>
+              <a:t> le</a:t>
+            </a:r>
+            <a:r>
+              <a:rPr lang="zh-CN" altLang="de-DE" dirty="0"/>
+              <a:t>）</a:t>
+            </a:r>
+            <a:r>
+              <a:rPr lang="de-DE" dirty="0"/>
+              <a:t>, Konsonanten</a:t>
+            </a:r>
+            <a:r>
+              <a:rPr lang="zh-CN" altLang="de-DE" dirty="0"/>
+              <a:t>（</a:t>
+            </a:r>
+            <a:r>
+              <a:rPr lang="de-DE" altLang="zh-CN" dirty="0" err="1"/>
+              <a:t>kon</a:t>
+            </a:r>
+            <a:r>
+              <a:rPr lang="de-DE" altLang="zh-CN" dirty="0"/>
+              <a:t> so </a:t>
+            </a:r>
+            <a:r>
+              <a:rPr lang="de-DE" altLang="zh-CN" dirty="0" err="1"/>
+              <a:t>nan</a:t>
+            </a:r>
+            <a:r>
+              <a:rPr lang="de-DE" altLang="zh-CN" dirty="0"/>
+              <a:t> </a:t>
+            </a:r>
+            <a:r>
+              <a:rPr lang="de-DE" altLang="zh-CN" dirty="0" err="1"/>
+              <a:t>ten</a:t>
+            </a:r>
+            <a:r>
+              <a:rPr lang="zh-CN" altLang="de-DE" dirty="0"/>
+              <a:t>）</a:t>
+            </a:r>
+            <a:r>
+              <a:rPr lang="de-DE" dirty="0"/>
+              <a:t>und Sonderregeln für '</a:t>
             </a:r>
             <a:r>
               <a:rPr lang="de-DE" dirty="0" err="1"/>
@@ -929,65 +971,16 @@
             </a:r>
             <a:r>
               <a:rPr lang="de-DE" dirty="0"/>
-              <a:t>“ oder „</a:t>
-            </a:r>
-            <a:r>
-              <a:rPr lang="de-DE" dirty="0" err="1"/>
-              <a:t>squ</a:t>
-            </a:r>
-            <a:r>
-              <a:rPr lang="de-DE" dirty="0"/>
-              <a:t>“.</a:t>
-            </a:r>
-          </a:p>
-          <a:p>
-            <a:pPr marL="0" indent="0">
-              <a:buFont typeface="+mj-lt"/>
-              <a:buNone/>
-            </a:pPr>
+              <a:t>' automatisch zu verarbeiten </a:t>
+            </a:r>
+          </a:p>
+          <a:p>
             <a:endParaRPr lang="de-DE" dirty="0"/>
           </a:p>
           <a:p>
-            <a:pPr marL="0" indent="0">
-              <a:buFont typeface="+mj-lt"/>
-              <a:buNone/>
-            </a:pPr>
-            <a:r>
-              <a:rPr lang="de-DE" dirty="0"/>
-              <a:t>Die andere</a:t>
-            </a:r>
-            <a:r>
-              <a:rPr lang="de-DE" altLang="zh-CN" dirty="0"/>
-              <a:t>n</a:t>
-            </a:r>
-            <a:r>
-              <a:rPr lang="de-DE" dirty="0"/>
-              <a:t> Zeichen werden übersprungen.</a:t>
-            </a:r>
-          </a:p>
-          <a:p>
-            <a:endParaRPr lang="de-DE" dirty="0"/>
-          </a:p>
-          <a:p>
-            <a:r>
-              <a:rPr lang="de-DE" dirty="0"/>
-              <a:t>Um die Umwandlung zu implementieren, werden mehrere String-Methode, zum Beispiel </a:t>
-            </a:r>
-            <a:r>
-              <a:rPr lang="de-DE" dirty="0" err="1"/>
-              <a:t>split</a:t>
-            </a:r>
-            <a:r>
-              <a:rPr lang="de-DE" dirty="0"/>
-              <a:t>(), match(), </a:t>
-            </a:r>
-            <a:r>
-              <a:rPr lang="de-DE" dirty="0" err="1"/>
-              <a:t>replace</a:t>
-            </a:r>
-            <a:r>
-              <a:rPr lang="de-DE" dirty="0"/>
-              <a:t>() und den regulären Ausdruck verwendet.</a:t>
+            <a:r>
+              <a:rPr lang="de-DE" dirty="0"/>
+              <a:t>– die Logik hierfür bildet die Basis für die Textmanipulation im nächsten Projekt.</a:t>
             </a:r>
           </a:p>
         </p:txBody>
@@ -1074,7 +1067,7 @@
           <a:p>
             <a:r>
               <a:rPr lang="de-DE" dirty="0"/>
-              <a:t>Das dritte Programm ist die Caesar-Verschlüsselung.</a:t>
+              <a:t>Das wichtige Programm ist die Caesar-Verschlüsselung.</a:t>
             </a:r>
           </a:p>
           <a:p>
@@ -1084,59 +1077,116 @@
             </a:r>
           </a:p>
           <a:p>
+            <a:r>
+              <a:rPr lang="de-DE" dirty="0"/>
+              <a:t>Mein Ziel war es nicht nur, Text zu verschieben, sondern eine </a:t>
+            </a:r>
+            <a:r>
+              <a:rPr lang="de-DE" b="1" dirty="0"/>
+              <a:t>robuste Lösung</a:t>
+            </a:r>
+            <a:r>
+              <a:rPr lang="de-DE" dirty="0"/>
+              <a:t> zu entwickeln, die auch Sonderzeichen und negative Zahlen fehlerfrei verarbeitet.</a:t>
+            </a:r>
+          </a:p>
+          <a:p>
             <a:endParaRPr lang="de-DE" dirty="0"/>
           </a:p>
           <a:p>
-            <a:r>
-              <a:rPr lang="de-DE" dirty="0"/>
-              <a:t>Ein wichtiges Problem ist der Umgang mit negativen Verschiebungen.</a:t>
-            </a:r>
-          </a:p>
-          <a:p>
-            <a:r>
-              <a:rPr lang="de-DE" dirty="0"/>
-              <a:t>Also, in JavaScript ist der Operator % kein echtes Modulo.</a:t>
-            </a:r>
-          </a:p>
-          <a:p>
             <a:endParaRPr lang="de-DE" dirty="0"/>
           </a:p>
           <a:p>
-            <a:r>
-              <a:rPr lang="de-DE" dirty="0"/>
-              <a:t>Deshalb habe ich diese Formel verwendet: ((</a:t>
-            </a:r>
-            <a:r>
-              <a:rPr lang="de-DE" dirty="0" err="1"/>
+            <a:endParaRPr lang="de-DE" dirty="0"/>
+          </a:p>
+          <a:p>
+            <a:r>
+              <a:rPr lang="de-DE" b="1" dirty="0"/>
+              <a:t>A. Die mathematische Formel (Der Modulo-Trick)</a:t>
+            </a:r>
+          </a:p>
+          <a:p>
+            <a:r>
+              <a:rPr lang="de-DE" dirty="0"/>
+              <a:t>Das Herzstück ist diese Zeile: </a:t>
+            </a:r>
+            <a:r>
+              <a:rPr lang="de-DE" sz="1200" kern="1200" dirty="0">
+                <a:solidFill>
+                  <a:schemeClr val="tx1"/>
+                </a:solidFill>
+                <a:latin typeface="+mn-lt"/>
+                <a:ea typeface="+mn-ea"/>
+                <a:cs typeface="+mn-cs"/>
+              </a:rPr>
+              <a:t>((</a:t>
+            </a:r>
+            <a:r>
+              <a:rPr lang="de-DE" sz="1200" kern="1200" dirty="0" err="1">
+                <a:solidFill>
+                  <a:schemeClr val="tx1"/>
+                </a:solidFill>
+                <a:latin typeface="+mn-lt"/>
+                <a:ea typeface="+mn-ea"/>
+                <a:cs typeface="+mn-cs"/>
+              </a:rPr>
               <a:t>index</a:t>
             </a:r>
             <a:r>
-              <a:rPr lang="de-DE" dirty="0"/>
-              <a:t> plus shift) </a:t>
-            </a:r>
-            <a:r>
-              <a:rPr lang="de-DE" dirty="0" err="1"/>
-              <a:t>modulo</a:t>
-            </a:r>
-            <a:r>
-              <a:rPr lang="de-DE" dirty="0"/>
-              <a:t> 26 plus 26) </a:t>
-            </a:r>
-            <a:r>
-              <a:rPr lang="de-DE" dirty="0" err="1"/>
-              <a:t>modulo</a:t>
-            </a:r>
-            <a:r>
-              <a:rPr lang="de-DE" dirty="0"/>
-              <a:t> 26, um d</a:t>
-            </a:r>
-            <a:r>
-              <a:rPr lang="de-DE" altLang="zh-CN" dirty="0"/>
-              <a:t>en</a:t>
-            </a:r>
-            <a:r>
-              <a:rPr lang="de-DE" dirty="0"/>
-              <a:t> Schlüssel zu normalisieren.</a:t>
+              <a:rPr lang="de-DE" sz="1200" kern="1200" dirty="0">
+                <a:solidFill>
+                  <a:schemeClr val="tx1"/>
+                </a:solidFill>
+                <a:latin typeface="+mn-lt"/>
+                <a:ea typeface="+mn-ea"/>
+                <a:cs typeface="+mn-cs"/>
+              </a:rPr>
+              <a:t> + shift) % 26 + 26) % 26</a:t>
+            </a:r>
+            <a:r>
+              <a:rPr lang="de-DE" dirty="0"/>
+              <a:t>. </a:t>
+            </a:r>
+          </a:p>
+          <a:p>
+            <a:r>
+              <a:rPr lang="de-DE" dirty="0"/>
+              <a:t>Warum mache ich das so kompliziert? </a:t>
+            </a:r>
+          </a:p>
+          <a:p>
+            <a:r>
+              <a:rPr lang="de-DE" dirty="0"/>
+              <a:t>In JavaScript liefert ein einfaches Modulo bei negativen Zahlen oft negative Ergebnisse. </a:t>
+            </a:r>
+          </a:p>
+          <a:p>
+            <a:r>
+              <a:rPr lang="de-DE" dirty="0"/>
+              <a:t>Durch das zusätzliche </a:t>
+            </a:r>
+            <a:r>
+              <a:rPr lang="de-DE" sz="1200" kern="1200" dirty="0">
+                <a:solidFill>
+                  <a:schemeClr val="tx1"/>
+                </a:solidFill>
+                <a:latin typeface="+mn-lt"/>
+                <a:ea typeface="+mn-ea"/>
+                <a:cs typeface="+mn-cs"/>
+              </a:rPr>
+              <a:t>+ 26</a:t>
+            </a:r>
+            <a:r>
+              <a:rPr lang="de-DE" dirty="0"/>
+              <a:t> stelle ich sicher, dass der Index </a:t>
+            </a:r>
+            <a:r>
+              <a:rPr lang="de-DE" b="1" dirty="0"/>
+              <a:t>immer positiv</a:t>
+            </a:r>
+            <a:r>
+              <a:rPr lang="de-DE" dirty="0"/>
+              <a:t> bleibt und korrekt im Alphabet landet. </a:t>
             </a:r>
           </a:p>
           <a:p>
@@ -1144,9 +1194,343 @@
           </a:p>
           <a:p>
             <a:r>
-              <a:rPr lang="de-DE" dirty="0"/>
-              <a:t>Dadurch bleibt das Ergebnis immer zwischen 0 und 25.</a:t>
-            </a:r>
+              <a:rPr lang="de-DE" sz="1200" b="1" kern="1200" dirty="0">
+                <a:solidFill>
+                  <a:schemeClr val="tx1"/>
+                </a:solidFill>
+                <a:effectLst/>
+                <a:latin typeface="+mn-lt"/>
+                <a:ea typeface="+mn-ea"/>
+                <a:cs typeface="+mn-cs"/>
+              </a:rPr>
+              <a:t>B. Umgang mit Sonderzeichen (Die Filterung)</a:t>
+            </a:r>
+          </a:p>
+          <a:p>
+            <a:r>
+              <a:rPr lang="de-DE" sz="1200" kern="1200" dirty="0">
+                <a:solidFill>
+                  <a:schemeClr val="tx1"/>
+                </a:solidFill>
+                <a:effectLst/>
+                <a:latin typeface="+mn-lt"/>
+                <a:ea typeface="+mn-ea"/>
+                <a:cs typeface="+mn-cs"/>
+              </a:rPr>
+              <a:t>Wie behandle ich Leerzeichen oder Zahlen? </a:t>
+            </a:r>
+          </a:p>
+          <a:p>
+            <a:r>
+              <a:rPr lang="de-DE" sz="1200" kern="1200" dirty="0">
+                <a:solidFill>
+                  <a:schemeClr val="tx1"/>
+                </a:solidFill>
+                <a:effectLst/>
+                <a:latin typeface="+mn-lt"/>
+                <a:ea typeface="+mn-ea"/>
+                <a:cs typeface="+mn-cs"/>
+              </a:rPr>
+              <a:t>Ich prüfe mit </a:t>
+            </a:r>
+            <a:r>
+              <a:rPr lang="de-DE" sz="1200" kern="1200" dirty="0" err="1">
+                <a:solidFill>
+                  <a:schemeClr val="tx1"/>
+                </a:solidFill>
+                <a:effectLst/>
+                <a:latin typeface="+mn-lt"/>
+                <a:ea typeface="+mn-ea"/>
+                <a:cs typeface="+mn-cs"/>
+              </a:rPr>
+              <a:t>alphabet.indexOf</a:t>
+            </a:r>
+            <a:r>
+              <a:rPr lang="de-DE" sz="1200" kern="1200" dirty="0">
+                <a:solidFill>
+                  <a:schemeClr val="tx1"/>
+                </a:solidFill>
+                <a:effectLst/>
+                <a:latin typeface="+mn-lt"/>
+                <a:ea typeface="+mn-ea"/>
+                <a:cs typeface="+mn-cs"/>
+              </a:rPr>
+              <a:t>(</a:t>
+            </a:r>
+            <a:r>
+              <a:rPr lang="de-DE" sz="1200" kern="1200" dirty="0" err="1">
+                <a:solidFill>
+                  <a:schemeClr val="tx1"/>
+                </a:solidFill>
+                <a:effectLst/>
+                <a:latin typeface="+mn-lt"/>
+                <a:ea typeface="+mn-ea"/>
+                <a:cs typeface="+mn-cs"/>
+              </a:rPr>
+              <a:t>char.toLowerCase</a:t>
+            </a:r>
+            <a:r>
+              <a:rPr lang="de-DE" sz="1200" kern="1200" dirty="0">
+                <a:solidFill>
+                  <a:schemeClr val="tx1"/>
+                </a:solidFill>
+                <a:effectLst/>
+                <a:latin typeface="+mn-lt"/>
+                <a:ea typeface="+mn-ea"/>
+                <a:cs typeface="+mn-cs"/>
+              </a:rPr>
+              <a:t>()). </a:t>
+            </a:r>
+          </a:p>
+          <a:p>
+            <a:r>
+              <a:rPr lang="de-DE" sz="1200" kern="1200" dirty="0">
+                <a:solidFill>
+                  <a:schemeClr val="tx1"/>
+                </a:solidFill>
+                <a:effectLst/>
+                <a:latin typeface="+mn-lt"/>
+                <a:ea typeface="+mn-ea"/>
+                <a:cs typeface="+mn-cs"/>
+              </a:rPr>
+              <a:t>Wenn das Zeichen nicht im Array existiert, ist der Index -1. </a:t>
+            </a:r>
+          </a:p>
+          <a:p>
+            <a:r>
+              <a:rPr lang="de-DE" sz="1200" kern="1200" dirty="0">
+                <a:solidFill>
+                  <a:schemeClr val="tx1"/>
+                </a:solidFill>
+                <a:effectLst/>
+                <a:latin typeface="+mn-lt"/>
+                <a:ea typeface="+mn-ea"/>
+                <a:cs typeface="+mn-cs"/>
+              </a:rPr>
+              <a:t>In diesem Fall wird die Verschlüsselung </a:t>
+            </a:r>
+            <a:r>
+              <a:rPr lang="de-DE" sz="1200" b="1" kern="1200" dirty="0">
+                <a:solidFill>
+                  <a:schemeClr val="tx1"/>
+                </a:solidFill>
+                <a:effectLst/>
+                <a:latin typeface="+mn-lt"/>
+                <a:ea typeface="+mn-ea"/>
+                <a:cs typeface="+mn-cs"/>
+              </a:rPr>
+              <a:t>umgangen</a:t>
+            </a:r>
+            <a:r>
+              <a:rPr lang="de-DE" sz="1200" kern="1200" dirty="0">
+                <a:solidFill>
+                  <a:schemeClr val="tx1"/>
+                </a:solidFill>
+                <a:effectLst/>
+                <a:latin typeface="+mn-lt"/>
+                <a:ea typeface="+mn-ea"/>
+                <a:cs typeface="+mn-cs"/>
+              </a:rPr>
+              <a:t> – das Zeichen wird einfach direkt an den neuen Text angehängt. </a:t>
+            </a:r>
+          </a:p>
+          <a:p>
+            <a:r>
+              <a:rPr lang="de-DE" sz="1200" kern="1200" dirty="0">
+                <a:solidFill>
+                  <a:schemeClr val="tx1"/>
+                </a:solidFill>
+                <a:effectLst/>
+                <a:latin typeface="+mn-lt"/>
+                <a:ea typeface="+mn-ea"/>
+                <a:cs typeface="+mn-cs"/>
+              </a:rPr>
+              <a:t>So bleibt die Struktur des Satzes perfekt erhalten.</a:t>
+            </a:r>
+          </a:p>
+          <a:p>
+            <a:endParaRPr lang="de-DE" sz="1200" kern="1200" dirty="0">
+              <a:solidFill>
+                <a:schemeClr val="tx1"/>
+              </a:solidFill>
+              <a:effectLst/>
+              <a:latin typeface="+mn-lt"/>
+              <a:ea typeface="+mn-ea"/>
+              <a:cs typeface="+mn-cs"/>
+            </a:endParaRPr>
+          </a:p>
+          <a:p>
+            <a:r>
+              <a:rPr lang="de-DE" b="1" dirty="0"/>
+              <a:t>C. Case </a:t>
+            </a:r>
+            <a:r>
+              <a:rPr lang="de-DE" b="1" dirty="0" err="1"/>
+              <a:t>Sensitivity</a:t>
+            </a:r>
+            <a:r>
+              <a:rPr lang="de-DE" b="1" dirty="0"/>
+              <a:t> (Groß- und Kleinschreibung)</a:t>
+            </a:r>
+          </a:p>
+          <a:p>
+            <a:r>
+              <a:rPr lang="de-DE" dirty="0"/>
+              <a:t>Damit der Text lesbar bleibt, speichere ich mit </a:t>
+            </a:r>
+            <a:r>
+              <a:rPr lang="de-DE" sz="1200" kern="1200" dirty="0" err="1">
+                <a:solidFill>
+                  <a:schemeClr val="tx1"/>
+                </a:solidFill>
+                <a:latin typeface="+mn-lt"/>
+                <a:ea typeface="+mn-ea"/>
+                <a:cs typeface="+mn-cs"/>
+              </a:rPr>
+              <a:t>isUpper</a:t>
+            </a:r>
+            <a:r>
+              <a:rPr lang="de-DE" dirty="0"/>
+              <a:t>, ob der ursprüngliche Buchstabe großgeschrieben war. </a:t>
+            </a:r>
+          </a:p>
+          <a:p>
+            <a:r>
+              <a:rPr lang="de-DE" dirty="0"/>
+              <a:t>Nach der Verschiebung wandle ich ihn bei Bedarf einfach wieder in einen Großbuchstaben um.„</a:t>
+            </a:r>
+          </a:p>
+          <a:p>
+            <a:endParaRPr lang="de-DE" dirty="0"/>
+          </a:p>
+          <a:p>
+            <a:endParaRPr lang="de-DE" dirty="0"/>
+          </a:p>
+          <a:p>
+            <a:endParaRPr lang="de-DE" dirty="0"/>
+          </a:p>
+          <a:p>
+            <a:r>
+              <a:rPr lang="de-DE" dirty="0"/>
+              <a:t>Um die Robustheit meines Programms zu testen, verwende ich einen komplexen Satz mit vielen Sonderzeichen.</a:t>
+            </a:r>
+          </a:p>
+          <a:p>
+            <a:endParaRPr lang="de-DE" dirty="0"/>
+          </a:p>
+          <a:p>
+            <a:r>
+              <a:rPr lang="de-DE" dirty="0"/>
+              <a:t>Zuerst verschlüsseln wir diesen komplexen Satz mit einem Shift von </a:t>
+            </a:r>
+            <a:r>
+              <a:rPr lang="de-DE" b="1" dirty="0"/>
+              <a:t>plus drei</a:t>
+            </a:r>
+            <a:r>
+              <a:rPr lang="de-DE" dirty="0"/>
+              <a:t>. </a:t>
+            </a:r>
+          </a:p>
+          <a:p>
+            <a:r>
+              <a:rPr lang="de-DE" dirty="0"/>
+              <a:t>Wie Sie sehen, bleiben Kommas, Bindestriche und das Ausrufezeichen </a:t>
+            </a:r>
+            <a:r>
+              <a:rPr lang="de-DE" b="1" dirty="0"/>
+              <a:t>unverändert</a:t>
+            </a:r>
+            <a:r>
+              <a:rPr lang="de-DE" dirty="0"/>
+              <a:t>, während die Buchstaben verschoben werden.</a:t>
+            </a:r>
+          </a:p>
+          <a:p>
+            <a:endParaRPr lang="de-DE" dirty="0"/>
+          </a:p>
+          <a:p>
+            <a:r>
+              <a:rPr lang="de-DE" dirty="0"/>
+              <a:t>Jetzt nutzen wir einen negativen Shift von </a:t>
+            </a:r>
+            <a:r>
+              <a:rPr lang="de-DE" b="1" dirty="0"/>
+              <a:t>minus drei</a:t>
+            </a:r>
+            <a:r>
+              <a:rPr lang="de-DE" dirty="0"/>
+              <a:t>. </a:t>
+            </a:r>
+          </a:p>
+          <a:p>
+            <a:r>
+              <a:rPr lang="de-DE" dirty="0"/>
+              <a:t>Dank meiner mathematischen Formel springt das Alphabet korrekt zurück – zum Beispiel wird hier aus einem </a:t>
+            </a:r>
+            <a:r>
+              <a:rPr lang="de-DE" b="1" dirty="0"/>
+              <a:t>'B' ein 'Y‘</a:t>
+            </a:r>
+            <a:r>
+              <a:rPr lang="de-DE" dirty="0"/>
+              <a:t>. </a:t>
+            </a:r>
+          </a:p>
+          <a:p>
+            <a:r>
+              <a:rPr lang="de-DE" dirty="0"/>
+              <a:t>Das zeigt, dass der Code mathematisch absolut stabil ist.</a:t>
+            </a:r>
+          </a:p>
+          <a:p>
+            <a:endParaRPr lang="de-DE" sz="1200" kern="1200" dirty="0">
+              <a:solidFill>
+                <a:schemeClr val="tx1"/>
+              </a:solidFill>
+              <a:effectLst/>
+              <a:latin typeface="+mn-lt"/>
+              <a:ea typeface="+mn-ea"/>
+              <a:cs typeface="+mn-cs"/>
+            </a:endParaRPr>
+          </a:p>
+          <a:p>
+            <a:r>
+              <a:rPr lang="de-DE" dirty="0"/>
+              <a:t>Zum Schluss führen wir die </a:t>
+            </a:r>
+            <a:r>
+              <a:rPr lang="de-DE" b="1" dirty="0"/>
+              <a:t>Entschlüsselung</a:t>
+            </a:r>
+            <a:r>
+              <a:rPr lang="de-DE" dirty="0"/>
+              <a:t> durch, um den ursprünglichen Text wiederherzustellen. </a:t>
+            </a:r>
+          </a:p>
+          <a:p>
+            <a:r>
+              <a:rPr lang="de-DE" dirty="0"/>
+              <a:t>Damit ist der Funktionskreis geschlossen. </a:t>
+            </a:r>
+          </a:p>
+          <a:p>
+            <a:r>
+              <a:rPr lang="de-DE" dirty="0"/>
+              <a:t>Es beweist, dass das Programm nicht nur verschieben, sondern die Nachricht auch präzise wiederherstellen kann.</a:t>
+            </a:r>
+            <a:endParaRPr lang="de-DE" sz="1200" kern="1200" dirty="0">
+              <a:solidFill>
+                <a:schemeClr val="tx1"/>
+              </a:solidFill>
+              <a:effectLst/>
+              <a:latin typeface="+mn-lt"/>
+              <a:ea typeface="+mn-ea"/>
+              <a:cs typeface="+mn-cs"/>
+            </a:endParaRPr>
+          </a:p>
+          <a:p>
+            <a:endParaRPr lang="de-DE" dirty="0"/>
           </a:p>
         </p:txBody>
       </p:sp>
@@ -1232,7 +1616,7 @@
           <a:p>
             <a:r>
               <a:rPr lang="de-DE" dirty="0"/>
-              <a:t>Zusätzlich habe ich eine Web-Version erstellt. </a:t>
+              <a:t>Zusammenfassend lässt sich sagen: </a:t>
             </a:r>
           </a:p>
           <a:p>
@@ -1241,24 +1625,101 @@
           <a:p>
             <a:r>
               <a:rPr lang="de-DE" dirty="0"/>
-              <a:t>Hier verwende ich dieselbe Logik wie im Terminal, kombiniert mit </a:t>
-            </a:r>
-            <a:r>
-              <a:rPr lang="de-DE" dirty="0" err="1"/>
-              <a:t>Tailwind</a:t>
-            </a:r>
-            <a:r>
-              <a:rPr lang="de-DE" dirty="0"/>
-              <a:t> CSS für ein modernes Design und Event-</a:t>
-            </a:r>
-            <a:r>
-              <a:rPr lang="de-DE" dirty="0" err="1"/>
-              <a:t>Listenern</a:t>
-            </a:r>
-            <a:r>
-              <a:rPr lang="de-DE" dirty="0"/>
-              <a:t> für die Steuerung.</a:t>
-            </a:r>
+              <a:t>Die größte Herausforderung war die </a:t>
+            </a:r>
+            <a:r>
+              <a:rPr lang="de-DE" b="1" dirty="0"/>
+              <a:t>Zirkularität</a:t>
+            </a:r>
+            <a:r>
+              <a:rPr lang="de-DE" dirty="0"/>
+              <a:t> des Alphabets und die </a:t>
+            </a:r>
+            <a:r>
+              <a:rPr lang="de-DE" b="1" dirty="0"/>
+              <a:t>Sonderzeichen-Filterung</a:t>
+            </a:r>
+            <a:r>
+              <a:rPr lang="de-DE" dirty="0"/>
+              <a:t>. </a:t>
+            </a:r>
+          </a:p>
+          <a:p>
+            <a:r>
+              <a:rPr lang="de-DE" dirty="0"/>
+              <a:t>Mein Programm trennt die Logik der Verschiebung klar von der Textverarbeitung. </a:t>
+            </a:r>
+          </a:p>
+          <a:p>
+            <a:endParaRPr lang="de-DE" dirty="0"/>
+          </a:p>
+          <a:p>
+            <a:r>
+              <a:rPr lang="de-DE" dirty="0"/>
+              <a:t>Vielen Dank für Ihre Aufmerksamkeit! Haben Sie Fragen?</a:t>
+            </a:r>
+          </a:p>
+          <a:p>
+            <a:endParaRPr lang="de-DE" dirty="0"/>
+          </a:p>
+          <a:p>
+            <a:endParaRPr lang="de-DE" dirty="0"/>
+          </a:p>
+          <a:p>
+            <a:endParaRPr lang="de-DE" dirty="0"/>
+          </a:p>
+          <a:p>
+            <a:r>
+              <a:rPr lang="zh-CN" altLang="de-DE" b="1" dirty="0"/>
+              <a:t>为什么三版本？</a:t>
+            </a:r>
+          </a:p>
+          <a:p>
+            <a:r>
+              <a:rPr lang="de-DE" dirty="0"/>
+              <a:t>Ich wollte verschiedene Lösungsansätze vergleichen.</a:t>
+            </a:r>
+          </a:p>
+          <a:p>
+            <a:endParaRPr lang="de-DE" dirty="0"/>
+          </a:p>
+          <a:p>
+            <a:r>
+              <a:rPr lang="zh-CN" altLang="de-DE" b="1" dirty="0"/>
+              <a:t>为什么用数学方法？</a:t>
+            </a:r>
+          </a:p>
+          <a:p>
+            <a:r>
+              <a:rPr lang="de-DE" dirty="0"/>
+              <a:t>Die mathematische Lösung ist kürzer und besser skalierbar.</a:t>
+            </a:r>
+          </a:p>
+          <a:p>
+            <a:endParaRPr lang="de-DE" dirty="0"/>
+          </a:p>
+          <a:p>
+            <a:r>
+              <a:rPr lang="zh-CN" altLang="de-DE" b="1" dirty="0"/>
+              <a:t>为什么做 </a:t>
+            </a:r>
+            <a:r>
+              <a:rPr lang="de-DE" b="1" dirty="0"/>
+              <a:t>Browser </a:t>
+            </a:r>
+            <a:r>
+              <a:rPr lang="zh-CN" altLang="de-DE" b="1" dirty="0"/>
+              <a:t>版？</a:t>
+            </a:r>
+          </a:p>
+          <a:p>
+            <a:r>
+              <a:rPr lang="de-DE" dirty="0"/>
+              <a:t>Um die gleiche Logik in einer anderen Umgebung zu verwenden.</a:t>
+            </a:r>
+          </a:p>
+          <a:p>
+            <a:endParaRPr lang="de-DE" dirty="0"/>
           </a:p>
         </p:txBody>
       </p:sp>
@@ -1279,267 +1740,7 @@
           <a:p>
             <a:fld id="{885B3E4F-5E92-451B-897E-D579106EC7DB}" type="slidenum">
               <a:rPr lang="de-DE" smtClean="0"/>
-              <a:t>6</a:t>
-            </a:fld>
-            <a:endParaRPr lang="de-DE"/>
-          </a:p>
-        </p:txBody>
-      </p:sp>
-    </p:spTree>
-    <p:extLst>
-      <p:ext uri="{BB962C8B-B14F-4D97-AF65-F5344CB8AC3E}">
-        <p14:creationId xmlns:p14="http://schemas.microsoft.com/office/powerpoint/2010/main" val="318923000"/>
-      </p:ext>
-    </p:extLst>
-  </p:cSld>
-  <p:clrMapOvr>
-    <a:masterClrMapping/>
-  </p:clrMapOvr>
-</p:notes>
-</file>
-
-<file path=ppt/notesSlides/notesSlide6.xml><?xml version="1.0" encoding="utf-8"?>
-<p:notes xmlns:a="http://schemas.openxmlformats.org/drawingml/2006/main" xmlns:r="http://schemas.openxmlformats.org/officeDocument/2006/relationships" xmlns:p="http://schemas.openxmlformats.org/presentationml/2006/main">
-  <p:cSld>
-    <p:spTree>
-      <p:nvGrpSpPr>
-        <p:cNvPr id="1" name=""/>
-        <p:cNvGrpSpPr/>
-        <p:nvPr/>
-      </p:nvGrpSpPr>
-      <p:grpSpPr>
-        <a:xfrm>
-          <a:off x="0" y="0"/>
-          <a:ext cx="0" cy="0"/>
-          <a:chOff x="0" y="0"/>
-          <a:chExt cx="0" cy="0"/>
-        </a:xfrm>
-      </p:grpSpPr>
-      <p:sp>
-        <p:nvSpPr>
-          <p:cNvPr id="2" name="Folienbildplatzhalter 1"/>
-          <p:cNvSpPr>
-            <a:spLocks noGrp="1" noRot="1" noChangeAspect="1"/>
-          </p:cNvSpPr>
-          <p:nvPr>
-            <p:ph type="sldImg"/>
-          </p:nvPr>
-        </p:nvSpPr>
-        <p:spPr/>
-      </p:sp>
-      <p:sp>
-        <p:nvSpPr>
-          <p:cNvPr id="3" name="Notizenplatzhalter 2"/>
-          <p:cNvSpPr>
-            <a:spLocks noGrp="1"/>
-          </p:cNvSpPr>
-          <p:nvPr>
-            <p:ph type="body" idx="1"/>
-          </p:nvPr>
-        </p:nvSpPr>
-        <p:spPr/>
-        <p:txBody>
-          <a:bodyPr/>
-          <a:lstStyle/>
-          <a:p>
-            <a:r>
-              <a:rPr lang="en-US" dirty="0"/>
-              <a:t>Why My Final Solution Is Better?</a:t>
-            </a:r>
-          </a:p>
-          <a:p>
-            <a:endParaRPr lang="en-US" dirty="0"/>
-          </a:p>
-          <a:p>
-            <a:r>
-              <a:rPr lang="de-DE" dirty="0"/>
-              <a:t>Zusammenfassend: </a:t>
-            </a:r>
-          </a:p>
-          <a:p>
-            <a:endParaRPr lang="de-DE" dirty="0"/>
-          </a:p>
-          <a:p>
-            <a:r>
-              <a:rPr lang="de-DE" dirty="0"/>
-              <a:t>Meine finale Lösung ist skalierbarer, hat weniger Wiederholungen und trennt die Logik klar vom Design.</a:t>
-            </a:r>
-          </a:p>
-        </p:txBody>
-      </p:sp>
-      <p:sp>
-        <p:nvSpPr>
-          <p:cNvPr id="4" name="Foliennummernplatzhalter 3"/>
-          <p:cNvSpPr>
-            <a:spLocks noGrp="1"/>
-          </p:cNvSpPr>
-          <p:nvPr>
-            <p:ph type="sldNum" sz="quarter" idx="5"/>
-          </p:nvPr>
-        </p:nvSpPr>
-        <p:spPr/>
-        <p:txBody>
-          <a:bodyPr/>
-          <a:lstStyle/>
-          <a:p>
-            <a:fld id="{885B3E4F-5E92-451B-897E-D579106EC7DB}" type="slidenum">
-              <a:rPr lang="de-DE" smtClean="0"/>
-              <a:t>8</a:t>
-            </a:fld>
-            <a:endParaRPr lang="de-DE"/>
-          </a:p>
-        </p:txBody>
-      </p:sp>
-    </p:spTree>
-    <p:extLst>
-      <p:ext uri="{BB962C8B-B14F-4D97-AF65-F5344CB8AC3E}">
-        <p14:creationId xmlns:p14="http://schemas.microsoft.com/office/powerpoint/2010/main" val="458359804"/>
-      </p:ext>
-    </p:extLst>
-  </p:cSld>
-  <p:clrMapOvr>
-    <a:masterClrMapping/>
-  </p:clrMapOvr>
-</p:notes>
-</file>
-
-<file path=ppt/notesSlides/notesSlide7.xml><?xml version="1.0" encoding="utf-8"?>
-<p:notes xmlns:a="http://schemas.openxmlformats.org/drawingml/2006/main" xmlns:r="http://schemas.openxmlformats.org/officeDocument/2006/relationships" xmlns:p="http://schemas.openxmlformats.org/presentationml/2006/main">
-  <p:cSld>
-    <p:spTree>
-      <p:nvGrpSpPr>
-        <p:cNvPr id="1" name=""/>
-        <p:cNvGrpSpPr/>
-        <p:nvPr/>
-      </p:nvGrpSpPr>
-      <p:grpSpPr>
-        <a:xfrm>
-          <a:off x="0" y="0"/>
-          <a:ext cx="0" cy="0"/>
-          <a:chOff x="0" y="0"/>
-          <a:chExt cx="0" cy="0"/>
-        </a:xfrm>
-      </p:grpSpPr>
-      <p:sp>
-        <p:nvSpPr>
-          <p:cNvPr id="2" name="Folienbildplatzhalter 1"/>
-          <p:cNvSpPr>
-            <a:spLocks noGrp="1" noRot="1" noChangeAspect="1"/>
-          </p:cNvSpPr>
-          <p:nvPr>
-            <p:ph type="sldImg"/>
-          </p:nvPr>
-        </p:nvSpPr>
-        <p:spPr/>
-      </p:sp>
-      <p:sp>
-        <p:nvSpPr>
-          <p:cNvPr id="3" name="Notizenplatzhalter 2"/>
-          <p:cNvSpPr>
-            <a:spLocks noGrp="1"/>
-          </p:cNvSpPr>
-          <p:nvPr>
-            <p:ph type="body" idx="1"/>
-          </p:nvPr>
-        </p:nvSpPr>
-        <p:spPr/>
-        <p:txBody>
-          <a:bodyPr/>
-          <a:lstStyle/>
-          <a:p>
-            <a:r>
-              <a:rPr lang="de-DE" dirty="0"/>
-              <a:t>Zusammenfassend habe ich meine Lösungen schrittweise verbessert und die Logik in verschiedenen Umgebungen angewendet.</a:t>
-            </a:r>
-          </a:p>
-          <a:p>
-            <a:endParaRPr lang="de-DE" dirty="0"/>
-          </a:p>
-          <a:p>
-            <a:r>
-              <a:rPr lang="de-DE" dirty="0"/>
-              <a:t>Vielen Dank für Ihre Aufmerksamkeit.</a:t>
-            </a:r>
-          </a:p>
-          <a:p>
-            <a:endParaRPr lang="de-DE" dirty="0"/>
-          </a:p>
-          <a:p>
-            <a:endParaRPr lang="de-DE" dirty="0"/>
-          </a:p>
-          <a:p>
-            <a:r>
-              <a:rPr lang="zh-CN" altLang="de-DE" b="1" dirty="0"/>
-              <a:t>为什么三版本？</a:t>
-            </a:r>
-          </a:p>
-          <a:p>
-            <a:r>
-              <a:rPr lang="de-DE" dirty="0"/>
-              <a:t>Ich wollte verschiedene Lösungsansätze vergleichen.</a:t>
-            </a:r>
-          </a:p>
-          <a:p>
-            <a:endParaRPr lang="de-DE" dirty="0"/>
-          </a:p>
-          <a:p>
-            <a:r>
-              <a:rPr lang="zh-CN" altLang="de-DE" b="1" dirty="0"/>
-              <a:t>为什么用数学方法？</a:t>
-            </a:r>
-          </a:p>
-          <a:p>
-            <a:r>
-              <a:rPr lang="de-DE" dirty="0"/>
-              <a:t>Die mathematische Lösung ist kürzer und besser skalierbar.</a:t>
-            </a:r>
-          </a:p>
-          <a:p>
-            <a:endParaRPr lang="de-DE" dirty="0"/>
-          </a:p>
-          <a:p>
-            <a:r>
-              <a:rPr lang="zh-CN" altLang="de-DE" b="1" dirty="0"/>
-              <a:t>为什么做 </a:t>
-            </a:r>
-            <a:r>
-              <a:rPr lang="de-DE" b="1" dirty="0"/>
-              <a:t>Browser </a:t>
-            </a:r>
-            <a:r>
-              <a:rPr lang="zh-CN" altLang="de-DE" b="1" dirty="0"/>
-              <a:t>版？</a:t>
-            </a:r>
-          </a:p>
-          <a:p>
-            <a:r>
-              <a:rPr lang="de-DE" dirty="0"/>
-              <a:t>Um die gleiche Logik in einer anderen Umgebung zu verwenden.</a:t>
-            </a:r>
-          </a:p>
-          <a:p>
-            <a:endParaRPr lang="de-DE" dirty="0"/>
-          </a:p>
-        </p:txBody>
-      </p:sp>
-      <p:sp>
-        <p:nvSpPr>
-          <p:cNvPr id="4" name="Foliennummernplatzhalter 3"/>
-          <p:cNvSpPr>
-            <a:spLocks noGrp="1"/>
-          </p:cNvSpPr>
-          <p:nvPr>
-            <p:ph type="sldNum" sz="quarter" idx="5"/>
-          </p:nvPr>
-        </p:nvSpPr>
-        <p:spPr/>
-        <p:txBody>
-          <a:bodyPr/>
-          <a:lstStyle/>
-          <a:p>
-            <a:fld id="{885B3E4F-5E92-451B-897E-D579106EC7DB}" type="slidenum">
-              <a:rPr lang="de-DE" smtClean="0"/>
-              <a:t>10</a:t>
+              <a:t>5</a:t>
             </a:fld>
             <a:endParaRPr lang="de-DE"/>
           </a:p>
@@ -4654,7 +4855,15 @@
             <a:pPr lvl="1"/>
             <a:r>
               <a:rPr lang="de-DE" dirty="0"/>
-              <a:t>Browser-Version</a:t>
+              <a:t>Browser-Version mit </a:t>
+            </a:r>
+            <a:r>
+              <a:rPr lang="de-DE" dirty="0" err="1"/>
+              <a:t>Tailwind</a:t>
+            </a:r>
+            <a:r>
+              <a:rPr lang="de-DE" dirty="0"/>
+              <a:t> CSS </a:t>
             </a:r>
           </a:p>
           <a:p>
@@ -4679,73 +4888,6 @@
           </a:p>
           <a:p>
             <a:endParaRPr dirty="0"/>
-          </a:p>
-        </p:txBody>
-      </p:sp>
-    </p:spTree>
-  </p:cSld>
-  <p:clrMapOvr>
-    <a:masterClrMapping/>
-  </p:clrMapOvr>
-</p:sld>
-</file>
-
-<file path=ppt/slides/slide10.xml><?xml version="1.0" encoding="utf-8"?>
-<p:sld xmlns:a="http://schemas.openxmlformats.org/drawingml/2006/main" xmlns:r="http://schemas.openxmlformats.org/officeDocument/2006/relationships" xmlns:p="http://schemas.openxmlformats.org/presentationml/2006/main">
-  <p:cSld>
-    <p:spTree>
-      <p:nvGrpSpPr>
-        <p:cNvPr id="1" name=""/>
-        <p:cNvGrpSpPr/>
-        <p:nvPr/>
-      </p:nvGrpSpPr>
-      <p:grpSpPr>
-        <a:xfrm>
-          <a:off x="0" y="0"/>
-          <a:ext cx="0" cy="0"/>
-          <a:chOff x="0" y="0"/>
-          <a:chExt cx="0" cy="0"/>
-        </a:xfrm>
-      </p:grpSpPr>
-      <p:sp>
-        <p:nvSpPr>
-          <p:cNvPr id="2" name="Title 1"/>
-          <p:cNvSpPr>
-            <a:spLocks noGrp="1"/>
-          </p:cNvSpPr>
-          <p:nvPr>
-            <p:ph type="title"/>
-          </p:nvPr>
-        </p:nvSpPr>
-        <p:spPr/>
-        <p:txBody>
-          <a:bodyPr/>
-          <a:lstStyle/>
-          <a:p>
-            <a:r>
-              <a:t>Danke!</a:t>
-            </a:r>
-          </a:p>
-        </p:txBody>
-      </p:sp>
-      <p:sp>
-        <p:nvSpPr>
-          <p:cNvPr id="3" name="Content Placeholder 2"/>
-          <p:cNvSpPr>
-            <a:spLocks noGrp="1"/>
-          </p:cNvSpPr>
-          <p:nvPr>
-            <p:ph idx="1"/>
-          </p:nvPr>
-        </p:nvSpPr>
-        <p:spPr/>
-        <p:txBody>
-          <a:bodyPr/>
-          <a:lstStyle/>
-          <a:p>
-            <a:r>
-              <a:t>Fragen?</a:t>
-            </a:r>
           </a:p>
         </p:txBody>
       </p:sp>
@@ -5190,24 +5332,85 @@
         </p:nvSpPr>
         <p:spPr/>
         <p:txBody>
-          <a:bodyPr/>
-          <a:lstStyle/>
-          <a:p>
-            <a:r>
-              <a:t>Buchstaben mit Schlüssel verschieben</a:t>
-            </a:r>
-          </a:p>
-          <a:p>
-            <a:r>
+          <a:bodyPr>
+            <a:normAutofit lnSpcReduction="10000"/>
+          </a:bodyPr>
+          <a:lstStyle/>
+          <a:p>
+            <a:r>
+              <a:rPr dirty="0" err="1"/>
+              <a:t>Buchstaben</a:t>
+            </a:r>
+            <a:r>
+              <a:rPr dirty="0"/>
+              <a:t> </a:t>
+            </a:r>
+            <a:r>
+              <a:rPr dirty="0" err="1"/>
+              <a:t>mit</a:t>
+            </a:r>
+            <a:r>
+              <a:rPr dirty="0"/>
+              <a:t> </a:t>
+            </a:r>
+            <a:r>
+              <a:rPr dirty="0" err="1"/>
+              <a:t>Schlüssel</a:t>
+            </a:r>
+            <a:r>
+              <a:rPr dirty="0"/>
+              <a:t> </a:t>
+            </a:r>
+            <a:r>
+              <a:rPr dirty="0" err="1"/>
+              <a:t>verschieben</a:t>
+            </a:r>
+            <a:endParaRPr lang="de-DE" dirty="0"/>
+          </a:p>
+          <a:p>
+            <a:pPr marL="0" indent="0">
+              <a:buNone/>
+            </a:pPr>
+            <a:endParaRPr lang="de-DE" dirty="0"/>
+          </a:p>
+          <a:p>
+            <a:pPr marL="0" indent="0">
+              <a:buNone/>
+            </a:pPr>
+            <a:endParaRPr lang="de-DE" dirty="0"/>
+          </a:p>
+          <a:p>
+            <a:r>
+              <a:rPr lang="de-DE" dirty="0"/>
+              <a:t>Die mathematische Formel </a:t>
+            </a:r>
+            <a:endParaRPr dirty="0"/>
+          </a:p>
+          <a:p>
+            <a:pPr lvl="1"/>
+            <a:r>
+              <a:rPr dirty="0"/>
+              <a:t>((index + shift) % 26 + 26) % 26</a:t>
+            </a:r>
+            <a:endParaRPr lang="de-DE" dirty="0"/>
+          </a:p>
+          <a:p>
+            <a:pPr lvl="1"/>
+            <a:r>
+              <a:rPr lang="de-DE" dirty="0"/>
               <a:t>Negative Verschiebung behandeln</a:t>
             </a:r>
           </a:p>
           <a:p>
-            <a:endParaRPr/>
-          </a:p>
-          <a:p>
-            <a:r>
-              <a:t>((index + shift) % 26 + 26) % 26</a:t>
+            <a:r>
+              <a:rPr lang="de-DE" dirty="0"/>
+              <a:t>Umgang mit Sonderzeichen </a:t>
+            </a:r>
+          </a:p>
+          <a:p>
+            <a:r>
+              <a:rPr lang="de-DE" dirty="0"/>
+              <a:t>Groß- und Kleinschreibung</a:t>
             </a:r>
           </a:p>
         </p:txBody>
@@ -5253,7 +5456,7 @@
           <a:lstStyle/>
           <a:p>
             <a:r>
-              <a:t>CLI-Eingaben</a:t>
+              <a:t>Danke!</a:t>
             </a:r>
           </a:p>
         </p:txBody>
@@ -5274,371 +5477,7 @@
           <a:lstStyle/>
           <a:p>
             <a:r>
-              <a:rPr dirty="0" err="1"/>
-              <a:t>process.argv</a:t>
-            </a:r>
-            <a:endParaRPr dirty="0"/>
-          </a:p>
-          <a:p>
-            <a:r>
-              <a:rPr dirty="0" err="1"/>
-              <a:t>args.slice</a:t>
-            </a:r>
-            <a:r>
-              <a:rPr dirty="0"/>
-              <a:t>(2).join(" ")</a:t>
-            </a:r>
-          </a:p>
-          <a:p>
-            <a:endParaRPr dirty="0"/>
-          </a:p>
-          <a:p>
-            <a:r>
-              <a:rPr dirty="0" err="1"/>
-              <a:t>Unterstützt</a:t>
-            </a:r>
-            <a:r>
-              <a:rPr dirty="0"/>
-              <a:t> </a:t>
-            </a:r>
-            <a:r>
-              <a:rPr dirty="0" err="1"/>
-              <a:t>mehrere</a:t>
-            </a:r>
-            <a:r>
-              <a:rPr dirty="0"/>
-              <a:t> </a:t>
-            </a:r>
-            <a:r>
-              <a:rPr dirty="0" err="1"/>
-              <a:t>Wörter</a:t>
-            </a:r>
-            <a:endParaRPr dirty="0"/>
-          </a:p>
-        </p:txBody>
-      </p:sp>
-    </p:spTree>
-  </p:cSld>
-  <p:clrMapOvr>
-    <a:masterClrMapping/>
-  </p:clrMapOvr>
-</p:sld>
-</file>
-
-<file path=ppt/slides/slide6.xml><?xml version="1.0" encoding="utf-8"?>
-<p:sld xmlns:a="http://schemas.openxmlformats.org/drawingml/2006/main" xmlns:r="http://schemas.openxmlformats.org/officeDocument/2006/relationships" xmlns:p="http://schemas.openxmlformats.org/presentationml/2006/main">
-  <p:cSld>
-    <p:spTree>
-      <p:nvGrpSpPr>
-        <p:cNvPr id="1" name=""/>
-        <p:cNvGrpSpPr/>
-        <p:nvPr/>
-      </p:nvGrpSpPr>
-      <p:grpSpPr>
-        <a:xfrm>
-          <a:off x="0" y="0"/>
-          <a:ext cx="0" cy="0"/>
-          <a:chOff x="0" y="0"/>
-          <a:chExt cx="0" cy="0"/>
-        </a:xfrm>
-      </p:grpSpPr>
-      <p:sp>
-        <p:nvSpPr>
-          <p:cNvPr id="2" name="Title 1"/>
-          <p:cNvSpPr>
-            <a:spLocks noGrp="1"/>
-          </p:cNvSpPr>
-          <p:nvPr>
-            <p:ph type="title"/>
-          </p:nvPr>
-        </p:nvSpPr>
-        <p:spPr/>
-        <p:txBody>
-          <a:bodyPr/>
-          <a:lstStyle/>
-          <a:p>
-            <a:r>
-              <a:t>Browser-Version</a:t>
-            </a:r>
-          </a:p>
-        </p:txBody>
-      </p:sp>
-      <p:sp>
-        <p:nvSpPr>
-          <p:cNvPr id="3" name="Content Placeholder 2"/>
-          <p:cNvSpPr>
-            <a:spLocks noGrp="1"/>
-          </p:cNvSpPr>
-          <p:nvPr>
-            <p:ph idx="1"/>
-          </p:nvPr>
-        </p:nvSpPr>
-        <p:spPr/>
-        <p:txBody>
-          <a:bodyPr/>
-          <a:lstStyle/>
-          <a:p>
-            <a:r>
-              <a:t>HTML + Tailwind</a:t>
-            </a:r>
-          </a:p>
-          <a:p>
-            <a:r>
-              <a:t>Event Listener</a:t>
-            </a:r>
-          </a:p>
-          <a:p>
-            <a:r>
-              <a:t>DOM-Manipulation</a:t>
-            </a:r>
-          </a:p>
-          <a:p>
-            <a:endParaRPr/>
-          </a:p>
-          <a:p>
-            <a:r>
-              <a:t>Gleiche Logik wiederverwendet</a:t>
-            </a:r>
-          </a:p>
-        </p:txBody>
-      </p:sp>
-    </p:spTree>
-  </p:cSld>
-  <p:clrMapOvr>
-    <a:masterClrMapping/>
-  </p:clrMapOvr>
-</p:sld>
-</file>
-
-<file path=ppt/slides/slide7.xml><?xml version="1.0" encoding="utf-8"?>
-<p:sld xmlns:a="http://schemas.openxmlformats.org/drawingml/2006/main" xmlns:r="http://schemas.openxmlformats.org/officeDocument/2006/relationships" xmlns:p="http://schemas.openxmlformats.org/presentationml/2006/main">
-  <p:cSld>
-    <p:spTree>
-      <p:nvGrpSpPr>
-        <p:cNvPr id="1" name=""/>
-        <p:cNvGrpSpPr/>
-        <p:nvPr/>
-      </p:nvGrpSpPr>
-      <p:grpSpPr>
-        <a:xfrm>
-          <a:off x="0" y="0"/>
-          <a:ext cx="0" cy="0"/>
-          <a:chOff x="0" y="0"/>
-          <a:chExt cx="0" cy="0"/>
-        </a:xfrm>
-      </p:grpSpPr>
-      <p:sp>
-        <p:nvSpPr>
-          <p:cNvPr id="2" name="Title 1"/>
-          <p:cNvSpPr>
-            <a:spLocks noGrp="1"/>
-          </p:cNvSpPr>
-          <p:nvPr>
-            <p:ph type="title"/>
-          </p:nvPr>
-        </p:nvSpPr>
-        <p:spPr/>
-        <p:txBody>
-          <a:bodyPr/>
-          <a:lstStyle/>
-          <a:p>
-            <a:r>
-              <a:t>Vorher vs Nachher</a:t>
-            </a:r>
-          </a:p>
-        </p:txBody>
-      </p:sp>
-      <p:sp>
-        <p:nvSpPr>
-          <p:cNvPr id="3" name="Content Placeholder 2"/>
-          <p:cNvSpPr>
-            <a:spLocks noGrp="1"/>
-          </p:cNvSpPr>
-          <p:nvPr>
-            <p:ph idx="1"/>
-          </p:nvPr>
-        </p:nvSpPr>
-        <p:spPr/>
-        <p:txBody>
-          <a:bodyPr/>
-          <a:lstStyle/>
-          <a:p>
-            <a:r>
-              <a:t>Vorher: viele Bedingungen</a:t>
-            </a:r>
-          </a:p>
-          <a:p>
-            <a:r>
-              <a:t>Nachher: Map + mathematische Formel</a:t>
-            </a:r>
-          </a:p>
-          <a:p>
-            <a:endParaRPr/>
-          </a:p>
-          <a:p>
-            <a:r>
-              <a:t>Sauberer und besser skalierbar</a:t>
-            </a:r>
-          </a:p>
-        </p:txBody>
-      </p:sp>
-    </p:spTree>
-  </p:cSld>
-  <p:clrMapOvr>
-    <a:masterClrMapping/>
-  </p:clrMapOvr>
-</p:sld>
-</file>
-
-<file path=ppt/slides/slide8.xml><?xml version="1.0" encoding="utf-8"?>
-<p:sld xmlns:a="http://schemas.openxmlformats.org/drawingml/2006/main" xmlns:r="http://schemas.openxmlformats.org/officeDocument/2006/relationships" xmlns:p="http://schemas.openxmlformats.org/presentationml/2006/main">
-  <p:cSld>
-    <p:spTree>
-      <p:nvGrpSpPr>
-        <p:cNvPr id="1" name=""/>
-        <p:cNvGrpSpPr/>
-        <p:nvPr/>
-      </p:nvGrpSpPr>
-      <p:grpSpPr>
-        <a:xfrm>
-          <a:off x="0" y="0"/>
-          <a:ext cx="0" cy="0"/>
-          <a:chOff x="0" y="0"/>
-          <a:chExt cx="0" cy="0"/>
-        </a:xfrm>
-      </p:grpSpPr>
-      <p:sp>
-        <p:nvSpPr>
-          <p:cNvPr id="2" name="Title 1"/>
-          <p:cNvSpPr>
-            <a:spLocks noGrp="1"/>
-          </p:cNvSpPr>
-          <p:nvPr>
-            <p:ph type="title"/>
-          </p:nvPr>
-        </p:nvSpPr>
-        <p:spPr/>
-        <p:txBody>
-          <a:bodyPr>
-            <a:normAutofit fontScale="90000"/>
-          </a:bodyPr>
-          <a:lstStyle/>
-          <a:p>
-            <a:r>
-              <a:t>Warum ist die finale Lösung besser?</a:t>
-            </a:r>
-          </a:p>
-        </p:txBody>
-      </p:sp>
-      <p:sp>
-        <p:nvSpPr>
-          <p:cNvPr id="3" name="Content Placeholder 2"/>
-          <p:cNvSpPr>
-            <a:spLocks noGrp="1"/>
-          </p:cNvSpPr>
-          <p:nvPr>
-            <p:ph idx="1"/>
-          </p:nvPr>
-        </p:nvSpPr>
-        <p:spPr/>
-        <p:txBody>
-          <a:bodyPr/>
-          <a:lstStyle/>
-          <a:p>
-            <a:r>
-              <a:t>Weniger Wiederholung</a:t>
-            </a:r>
-          </a:p>
-          <a:p>
-            <a:r>
-              <a:t>Bessere Lesbarkeit</a:t>
-            </a:r>
-          </a:p>
-          <a:p>
-            <a:r>
-              <a:t>Behandelt Sonderfälle</a:t>
-            </a:r>
-          </a:p>
-          <a:p>
-            <a:r>
-              <a:t>Wiederverwendbar</a:t>
-            </a:r>
-          </a:p>
-        </p:txBody>
-      </p:sp>
-    </p:spTree>
-  </p:cSld>
-  <p:clrMapOvr>
-    <a:masterClrMapping/>
-  </p:clrMapOvr>
-</p:sld>
-</file>
-
-<file path=ppt/slides/slide9.xml><?xml version="1.0" encoding="utf-8"?>
-<p:sld xmlns:a="http://schemas.openxmlformats.org/drawingml/2006/main" xmlns:r="http://schemas.openxmlformats.org/officeDocument/2006/relationships" xmlns:p="http://schemas.openxmlformats.org/presentationml/2006/main">
-  <p:cSld>
-    <p:spTree>
-      <p:nvGrpSpPr>
-        <p:cNvPr id="1" name=""/>
-        <p:cNvGrpSpPr/>
-        <p:nvPr/>
-      </p:nvGrpSpPr>
-      <p:grpSpPr>
-        <a:xfrm>
-          <a:off x="0" y="0"/>
-          <a:ext cx="0" cy="0"/>
-          <a:chOff x="0" y="0"/>
-          <a:chExt cx="0" cy="0"/>
-        </a:xfrm>
-      </p:grpSpPr>
-      <p:sp>
-        <p:nvSpPr>
-          <p:cNvPr id="2" name="Title 1"/>
-          <p:cNvSpPr>
-            <a:spLocks noGrp="1"/>
-          </p:cNvSpPr>
-          <p:nvPr>
-            <p:ph type="title"/>
-          </p:nvPr>
-        </p:nvSpPr>
-        <p:spPr/>
-        <p:txBody>
-          <a:bodyPr/>
-          <a:lstStyle/>
-          <a:p>
-            <a:r>
-              <a:t>Wichtigste Erkenntnisse</a:t>
-            </a:r>
-          </a:p>
-        </p:txBody>
-      </p:sp>
-      <p:sp>
-        <p:nvSpPr>
-          <p:cNvPr id="3" name="Content Placeholder 2"/>
-          <p:cNvSpPr>
-            <a:spLocks noGrp="1"/>
-          </p:cNvSpPr>
-          <p:nvPr>
-            <p:ph idx="1"/>
-          </p:nvPr>
-        </p:nvSpPr>
-        <p:spPr/>
-        <p:txBody>
-          <a:bodyPr/>
-          <a:lstStyle/>
-          <a:p>
-            <a:r>
-              <a:t>Von einfach zu optimiert</a:t>
-            </a:r>
-          </a:p>
-          <a:p>
-            <a:r>
-              <a:t>Trennung von Logik und UI</a:t>
-            </a:r>
-          </a:p>
-          <a:p>
-            <a:r>
-              <a:t>Praktische JavaScript-Erfahrung</a:t>
+              <a:t>Fragen?</a:t>
             </a:r>
           </a:p>
         </p:txBody>
